--- a/tests/fixtures/layouts.pptx
+++ b/tests/fixtures/layouts.pptx
@@ -130,6 +130,81 @@
           <a:xfrm>
             <a:off x="685800" y="1828800"/>
             <a:ext cx="7772400" cy="3886200"/>
+          </a:xfrm>
+          <a:prstGeom prst="rect">
+            <a:avLst/>
+          </a:prstGeom>
+        </p:spPr>
+        <p:txBody>
+          <a:bodyPr/>
+          <a:lstStyle/>
+          <a:p/>
+        </p:txBody>
+      </p:sp>
+      <p:sp>
+        <p:nvSpPr>
+          <p:cNvPr id="4" name="Date Placeholder 3"/>
+          <p:cNvSpPr>
+            <a:spLocks noGrp="1"/>
+          </p:cNvSpPr>
+          <p:nvPr>
+            <p:ph type="dt" sz="half" idx="10"/>
+          </p:nvPr>
+        </p:nvSpPr>
+        <p:spPr>
+          <a:xfrm>
+            <a:off x="685800" y="6356350"/>
+            <a:ext cx="2057400" cy="365125"/>
+          </a:xfrm>
+          <a:prstGeom prst="rect">
+            <a:avLst/>
+          </a:prstGeom>
+        </p:spPr>
+        <p:txBody>
+          <a:bodyPr/>
+          <a:lstStyle/>
+          <a:p/>
+        </p:txBody>
+      </p:sp>
+      <p:sp>
+        <p:nvSpPr>
+          <p:cNvPr id="5" name="Footer Placeholder 4"/>
+          <p:cNvSpPr>
+            <a:spLocks noGrp="1"/>
+          </p:cNvSpPr>
+          <p:nvPr>
+            <p:ph type="ftr" sz="half" idx="11"/>
+          </p:nvPr>
+        </p:nvSpPr>
+        <p:spPr>
+          <a:xfrm>
+            <a:off x="3000000" y="6356350"/>
+            <a:ext cx="2057400" cy="365125"/>
+          </a:xfrm>
+          <a:prstGeom prst="rect">
+            <a:avLst/>
+          </a:prstGeom>
+        </p:spPr>
+        <p:txBody>
+          <a:bodyPr/>
+          <a:lstStyle/>
+          <a:p/>
+        </p:txBody>
+      </p:sp>
+      <p:sp>
+        <p:nvSpPr>
+          <p:cNvPr id="6" name="Slide Number Placeholder 5"/>
+          <p:cNvSpPr>
+            <a:spLocks noGrp="1"/>
+          </p:cNvSpPr>
+          <p:nvPr>
+            <p:ph type="sldNum" sz="half" idx="12"/>
+          </p:nvPr>
+        </p:nvSpPr>
+        <p:spPr>
+          <a:xfrm>
+            <a:off x="6400800" y="6356350"/>
+            <a:ext cx="2057400" cy="365125"/>
           </a:xfrm>
           <a:prstGeom prst="rect">
             <a:avLst/>

--- a/tests/fixtures/layouts.pptx
+++ b/tests/fixtures/layouts.pptx
@@ -137,7 +137,11 @@
         </p:spPr>
         <p:txBody>
           <a:bodyPr/>
-          <a:lstStyle/>
+          <a:lstStyle>
+            <a:lvl1pPr>
+              <a:defRPr b="1"/>
+            </a:lvl1pPr>
+          </a:lstStyle>
           <a:p/>
         </p:txBody>
       </p:sp>
@@ -317,9 +321,18 @@
       </a:lvl1pPr>
     </p:titleStyle>
     <p:bodyStyle>
-      <a:lvl1pPr>
+      <a:lvl1pPr marL="342900" indent="-342900">
+        <a:buChar char="•"/>
         <a:defRPr sz="3200"/>
       </a:lvl1pPr>
+      <a:lvl2pPr marL="742950" indent="-285750">
+        <a:buChar char="–"/>
+        <a:defRPr sz="2800"/>
+      </a:lvl2pPr>
+      <a:lvl3pPr marL="1143000" indent="-228600">
+        <a:buChar char="»"/>
+        <a:defRPr sz="2400"/>
+      </a:lvl3pPr>
     </p:bodyStyle>
     <p:otherStyle>
       <a:lvl1pPr>

--- a/tests/fixtures/layouts.pptx
+++ b/tests/fixtures/layouts.pptx
@@ -491,6 +491,101 @@
           </a:p>
         </p:txBody>
       </p:sp>
+      <p:grpSp>
+        <p:nvGrpSpPr>
+          <p:cNvPr id="4" name="Group 3"/>
+          <p:cNvGrpSpPr/>
+          <p:nvPr/>
+        </p:nvGrpSpPr>
+        <p:grpSpPr>
+          <a:xfrm>
+            <a:off x="457200" y="365125"/>
+            <a:ext cx="1828800" cy="914400"/>
+            <a:chOff x="1000000" y="2000000"/>
+            <a:chExt cx="3657600" cy="1828800"/>
+          </a:xfrm>
+        </p:grpSpPr>
+        <p:sp>
+          <p:nvSpPr>
+            <p:cNvPr id="5" name="Rectangle 4"/>
+            <p:cNvSpPr/>
+            <p:nvPr/>
+          </p:nvSpPr>
+          <p:spPr>
+            <a:xfrm>
+              <a:off x="1000000" y="2000000"/>
+              <a:ext cx="1828800" cy="1828800"/>
+            </a:xfrm>
+            <a:prstGeom prst="rect">
+              <a:avLst/>
+            </a:prstGeom>
+          </p:spPr>
+          <p:txBody>
+            <a:bodyPr/>
+            <a:lstStyle/>
+            <a:p/>
+          </p:txBody>
+        </p:sp>
+        <p:sp>
+          <p:nvSpPr>
+            <p:cNvPr id="6" name="Rectangle 5"/>
+            <p:cNvSpPr/>
+            <p:nvPr/>
+          </p:nvSpPr>
+          <p:spPr>
+            <a:xfrm>
+              <a:off x="2828800" y="2000000"/>
+              <a:ext cx="1828800" cy="1828800"/>
+            </a:xfrm>
+            <a:prstGeom prst="ellipse">
+              <a:avLst/>
+            </a:prstGeom>
+          </p:spPr>
+          <p:txBody>
+            <a:bodyPr/>
+            <a:lstStyle/>
+            <a:p/>
+          </p:txBody>
+        </p:sp>
+      </p:grpSp>
+      <p:graphicFrame>
+        <p:nvGraphicFramePr>
+          <p:cNvPr id="7" name="Table 6"/>
+          <p:cNvGraphicFramePr>
+            <a:graphicFrameLocks noGrp="1"/>
+          </p:cNvGraphicFramePr>
+          <p:nvPr/>
+        </p:nvGraphicFramePr>
+        <p:xfrm>
+          <a:off x="5486400" y="365125"/>
+          <a:ext cx="3048000" cy="370840"/>
+        </p:xfrm>
+        <a:graphic>
+          <a:graphicData uri="http://schemas.openxmlformats.org/drawingml/2006/table">
+            <a:tbl>
+              <a:tblPr firstRow="1" bandRow="1"/>
+              <a:tblGrid>
+                <a:gridCol w="3048000"/>
+              </a:tblGrid>
+              <a:tr h="370840">
+                <a:tc>
+                  <a:txBody>
+                    <a:bodyPr/>
+                    <a:lstStyle/>
+                    <a:p>
+                      <a:r>
+                        <a:rPr lang="en-US" dirty="0"/>
+                        <a:t>Cell</a:t>
+                      </a:r>
+                    </a:p>
+                  </a:txBody>
+                  <a:tcPr/>
+                </a:tc>
+              </a:tr>
+            </a:tbl>
+          </a:graphicData>
+        </a:graphic>
+      </p:graphicFrame>
     </p:spTree>
   </p:cSld>
   <p:clrMapOvr>

--- a/tests/fixtures/layouts.pptx
+++ b/tests/fixtures/layouts.pptx
@@ -102,10 +102,6 @@
           </p:nvPr>
         </p:nvSpPr>
         <p:spPr>
-          <a:xfrm>
-            <a:off x="685800" y="457200"/>
-            <a:ext cx="7772400" cy="1143000"/>
-          </a:xfrm>
           <a:prstGeom prst="rect">
             <a:avLst/>
           </a:prstGeom>
